--- a/examples/05_fintech_hft/Presentation.pptx
+++ b/examples/05_fintech_hft/Presentation.pptx
@@ -7,10 +7,9 @@
   <p:sldIdLst>
     <p:sldId id="256" r:id="rId2"/>
     <p:sldId id="257" r:id="rId3"/>
-    <p:sldId id="258" r:id="rId4"/>
   </p:sldIdLst>
   <p:notesMasterIdLst>
-    <p:notesMasterId r:id="rId5"/>
+    <p:notesMasterId r:id="rId4"/>
   </p:notesMasterIdLst>
   <p:sldSz cx="12192000" cy="6858000"/>
   <p:notesSz cx="6858000" cy="12192000"/>
@@ -504,8 +503,8 @@
           <a:p>
             <a:r>
               <a:rPr lang="en-US" dirty="0"/>
-              <a:t>1. Hero
-note: [오프닝] 나노초 단위 주문 처리와 실시간 리스크 헤징을 제공하는 FPGA HFT 엔진을 소개합니다.</a:t>
+              <a:t>Slide 1: Terminal Header &amp; Orderbook Depth
+note: FPGA 기반 380나노초 초저지연 트레이딩 엔진의 호가창 처리 구조입니다.</a:t>
             </a:r>
             <a:endParaRPr lang="en-US" dirty="0"/>
           </a:p>
@@ -593,8 +592,7 @@
           <a:p>
             <a:r>
               <a:rPr lang="en-US" dirty="0"/>
-              <a:t>2. Big Stats
-note: [지표] 380나노초 지연시간과 샤프지수 4.2를 달성했습니다.</a:t>
+              <a:t>Slide 2: Microsecond Tick Pipeline</a:t>
             </a:r>
             <a:endParaRPr lang="en-US" dirty="0"/>
           </a:p>
@@ -618,95 +616,6 @@
             <a:fld id="{F7021451-1387-4CA6-816F-3879F97B5CBC}" type="slidenum">
               <a:rPr lang="en-US"/>
               <a:t>2</a:t>
-            </a:fld>
-            <a:endParaRPr lang="en-US"/>
-          </a:p>
-        </p:txBody>
-      </p:sp>
-    </p:spTree>
-    <p:extLst>
-      <p:ext uri="{BB962C8B-B14F-4D97-AF65-F5344CB8AC3E}">
-        <p14:creationId xmlns:p14="http://schemas.microsoft.com/office/powerpoint/2010/main" val="1024086991"/>
-      </p:ext>
-    </p:extLst>
-  </p:cSld>
-  <p:clrMapOvr>
-    <a:masterClrMapping/>
-  </p:clrMapOvr>
-</p:notes>
-</file>
-
-<file path=ppt/notesSlides/notesSlide3.xml><?xml version="1.0" encoding="utf-8"?>
-<p:notes xmlns:a="http://schemas.openxmlformats.org/drawingml/2006/main" xmlns:r="http://schemas.openxmlformats.org/officeDocument/2006/relationships" xmlns:p="http://schemas.openxmlformats.org/presentationml/2006/main">
-  <p:cSld>
-    <p:spTree>
-      <p:nvGrpSpPr>
-        <p:cNvPr id="1" name=""/>
-        <p:cNvGrpSpPr/>
-        <p:nvPr/>
-      </p:nvGrpSpPr>
-      <p:grpSpPr>
-        <a:xfrm>
-          <a:off x="0" y="0"/>
-          <a:ext cx="0" cy="0"/>
-          <a:chOff x="0" y="0"/>
-          <a:chExt cx="0" cy="0"/>
-        </a:xfrm>
-      </p:grpSpPr>
-      <p:sp>
-        <p:nvSpPr>
-          <p:cNvPr id="2" name="Slide Image Placeholder 1"/>
-          <p:cNvSpPr>
-            <a:spLocks noGrp="1" noRot="1" noChangeAspect="1"/>
-          </p:cNvSpPr>
-          <p:nvPr>
-            <p:ph type="sldImg"/>
-          </p:nvPr>
-        </p:nvSpPr>
-        <p:spPr/>
-      </p:sp>
-      <p:sp>
-        <p:nvSpPr>
-          <p:cNvPr id="3" name="Notes Placeholder 2"/>
-          <p:cNvSpPr>
-            <a:spLocks noGrp="1"/>
-          </p:cNvSpPr>
-          <p:nvPr>
-            <p:ph type="body" idx="1"/>
-          </p:nvPr>
-        </p:nvSpPr>
-        <p:spPr/>
-        <p:txBody>
-          <a:bodyPr/>
-          <a:lstStyle/>
-          <a:p>
-            <a:r>
-              <a:rPr lang="en-US" dirty="0"/>
-              <a:t>3. Closing
-note: [마무리] 경청해 주셔서 감사합니다. 질문을 받겠습니다.</a:t>
-            </a:r>
-            <a:endParaRPr lang="en-US" dirty="0"/>
-          </a:p>
-        </p:txBody>
-      </p:sp>
-      <p:sp>
-        <p:nvSpPr>
-          <p:cNvPr id="4" name="Slide Number Placeholder 3"/>
-          <p:cNvSpPr>
-            <a:spLocks noGrp="1"/>
-          </p:cNvSpPr>
-          <p:nvPr>
-            <p:ph type="sldNum" sz="quarter" idx="10"/>
-          </p:nvPr>
-        </p:nvSpPr>
-        <p:spPr/>
-        <p:txBody>
-          <a:bodyPr/>
-          <a:lstStyle/>
-          <a:p>
-            <a:fld id="{F7021451-1387-4CA6-816F-3879F97B5CBC}" type="slidenum">
-              <a:rPr lang="en-US"/>
-              <a:t>3</a:t>
             </a:fld>
             <a:endParaRPr lang="en-US"/>
           </a:p>
@@ -1074,45 +983,6 @@
 <file path=ppt/slides/slide2.xml><?xml version="1.0" encoding="utf-8"?>
 <p:sld xmlns:a="http://schemas.openxmlformats.org/drawingml/2006/main" xmlns:r="http://schemas.openxmlformats.org/officeDocument/2006/relationships" xmlns:p="http://schemas.openxmlformats.org/presentationml/2006/main">
   <p:cSld name="Slide 2">
-    <p:bg>
-      <p:bgPr>
-        <a:blipFill dpi="0" rotWithShape="1">
-          <a:blip r:embed="rId1">
-            <a:lum/>
-          </a:blip>
-          <a:srcRect/>
-          <a:stretch>
-            <a:fillRect/>
-          </a:stretch>
-        </a:blipFill>
-        <a:effectLst/>
-      </p:bgPr>
-    </p:bg>
-    <p:spTree>
-      <p:nvGrpSpPr>
-        <p:cNvPr id="1" name=""/>
-        <p:cNvGrpSpPr/>
-        <p:nvPr/>
-      </p:nvGrpSpPr>
-      <p:grpSpPr>
-        <a:xfrm>
-          <a:off x="0" y="0"/>
-          <a:ext cx="0" cy="0"/>
-          <a:chOff x="0" y="0"/>
-          <a:chExt cx="0" cy="0"/>
-        </a:xfrm>
-      </p:grpSpPr>
-    </p:spTree>
-  </p:cSld>
-  <p:clrMapOvr>
-    <a:masterClrMapping/>
-  </p:clrMapOvr>
-</p:sld>
-</file>
-
-<file path=ppt/slides/slide3.xml><?xml version="1.0" encoding="utf-8"?>
-<p:sld xmlns:a="http://schemas.openxmlformats.org/drawingml/2006/main" xmlns:r="http://schemas.openxmlformats.org/officeDocument/2006/relationships" xmlns:p="http://schemas.openxmlformats.org/presentationml/2006/main">
-  <p:cSld name="Slide 3">
     <p:bg>
       <p:bgPr>
         <a:blipFill dpi="0" rotWithShape="1">

--- a/examples/05_fintech_hft/Presentation.pptx
+++ b/examples/05_fintech_hft/Presentation.pptx
@@ -503,8 +503,7 @@
           <a:p>
             <a:r>
               <a:rPr lang="en-US" dirty="0"/>
-              <a:t>Slide 1: Terminal Header &amp; Orderbook Depth
-note: FPGA 기반 380나노초 초저지연 트레이딩 엔진의 호가창 처리 구조입니다.</a:t>
+              <a:t>FPGA 기반 380나노초 초저지연 트레이딩 엔진의 호가창 처리 구조입니다.</a:t>
             </a:r>
             <a:endParaRPr lang="en-US" dirty="0"/>
           </a:p>
@@ -592,7 +591,7 @@
           <a:p>
             <a:r>
               <a:rPr lang="en-US" dirty="0"/>
-              <a:t>Slide 2: Microsecond Tick Pipeline</a:t>
+              <a:t/>
             </a:r>
             <a:endParaRPr lang="en-US" dirty="0"/>
           </a:p>
@@ -946,16 +945,9 @@
   <p:cSld name="Slide 1">
     <p:bg>
       <p:bgPr>
-        <a:blipFill dpi="0" rotWithShape="1">
-          <a:blip r:embed="rId1">
-            <a:lum/>
-          </a:blip>
-          <a:srcRect/>
-          <a:stretch>
-            <a:fillRect/>
-          </a:stretch>
-        </a:blipFill>
-        <a:effectLst/>
+        <a:solidFill>
+          <a:srgbClr val="060A14"/>
+        </a:solidFill>
       </p:bgPr>
     </p:bg>
     <p:spTree>
@@ -972,6 +964,830 @@
           <a:chExt cx="0" cy="0"/>
         </a:xfrm>
       </p:grpSpPr>
+      <p:sp>
+        <p:nvSpPr>
+          <p:cNvPr id="2" name="Shape 0"/>
+          <p:cNvSpPr/>
+          <p:nvPr/>
+        </p:nvSpPr>
+        <p:spPr>
+          <a:xfrm>
+            <a:off x="419070" y="342900"/>
+            <a:ext cx="11353830" cy="444124"/>
+          </a:xfrm>
+          <a:prstGeom prst="rect">
+            <a:avLst/>
+          </a:prstGeom>
+          <a:solidFill>
+            <a:srgbClr val="0F172A"/>
+          </a:solidFill>
+          <a:ln/>
+        </p:spPr>
+      </p:sp>
+      <p:sp>
+        <p:nvSpPr>
+          <p:cNvPr id="3" name="Shape 1"/>
+          <p:cNvSpPr/>
+          <p:nvPr/>
+        </p:nvSpPr>
+        <p:spPr>
+          <a:xfrm>
+            <a:off x="419070" y="768005"/>
+            <a:ext cx="11353830" cy="19020"/>
+          </a:xfrm>
+          <a:prstGeom prst="rect">
+            <a:avLst/>
+          </a:prstGeom>
+          <a:solidFill>
+            <a:srgbClr val="FFCC00"/>
+          </a:solidFill>
+          <a:ln/>
+        </p:spPr>
+      </p:sp>
+      <p:sp>
+        <p:nvSpPr>
+          <p:cNvPr id="4" name="Text 2"/>
+          <p:cNvSpPr txBox="1"/>
+          <p:nvPr/>
+        </p:nvSpPr>
+        <p:spPr>
+          <a:xfrm>
+            <a:off x="533370" y="392369"/>
+            <a:ext cx="6487028" cy="310805"/>
+          </a:xfrm>
+          <a:prstGeom prst="rect">
+            <a:avLst/>
+          </a:prstGeom>
+          <a:noFill/>
+          <a:ln/>
+        </p:spPr>
+        <p:txBody>
+          <a:bodyPr wrap="none" lIns="0" tIns="0" rIns="0" bIns="0" rtlCol="0" anchor="t"/>
+          <a:lstStyle/>
+          <a:p>
+            <a:pPr algn="l" indent="0" marL="0">
+              <a:lnSpc>
+                <a:spcPts val="2447"/>
+              </a:lnSpc>
+              <a:buNone/>
+            </a:pPr>
+            <a:r>
+              <a:rPr lang="en-US" sz="1631" b="1" spc="-54" kern="0" dirty="0">
+                <a:solidFill>
+                  <a:srgbClr val="E2E8F0"/>
+                </a:solidFill>
+                <a:latin typeface="Consolas" pitchFamily="34" charset="0"/>
+                <a:ea typeface="Consolas" pitchFamily="34" charset="-122"/>
+                <a:cs typeface="Consolas" pitchFamily="34" charset="-120"/>
+              </a:rPr>
+              <a:t>ALPHA HFT TERMINAL</a:t>
+            </a:r>
+            <a:pPr algn="l" indent="0" marL="0">
+              <a:lnSpc>
+                <a:spcPts val="2447"/>
+              </a:lnSpc>
+              <a:buNone/>
+            </a:pPr>
+            <a:r>
+              <a:rPr lang="en-US" sz="1631" spc="-54" kern="0" dirty="0">
+                <a:solidFill>
+                  <a:srgbClr val="E2E8F0"/>
+                </a:solidFill>
+                <a:latin typeface="Consolas" pitchFamily="34" charset="0"/>
+                <a:ea typeface="Consolas" pitchFamily="34" charset="-122"/>
+                <a:cs typeface="Consolas" pitchFamily="34" charset="-120"/>
+              </a:rPr>
+              <a:t> // CME:NQ1! </a:t>
+            </a:r>
+            <a:pPr algn="l" indent="0" marL="0">
+              <a:lnSpc>
+                <a:spcPts val="2447"/>
+              </a:lnSpc>
+              <a:buNone/>
+            </a:pPr>
+            <a:r>
+              <a:rPr lang="en-US" sz="1631" spc="-54" kern="0" dirty="0">
+                <a:solidFill>
+                  <a:srgbClr val="10B981"/>
+                </a:solidFill>
+                <a:latin typeface="Consolas" pitchFamily="34" charset="0"/>
+                <a:ea typeface="Consolas" pitchFamily="34" charset="-122"/>
+                <a:cs typeface="Consolas" pitchFamily="34" charset="-120"/>
+              </a:rPr>
+              <a:t>▲ 19,842.50 (+1.42%)</a:t>
+            </a:r>
+            <a:endParaRPr lang="en-US" sz="1631" dirty="0"/>
+          </a:p>
+        </p:txBody>
+      </p:sp>
+      <p:sp>
+        <p:nvSpPr>
+          <p:cNvPr id="5" name="Text 3"/>
+          <p:cNvSpPr txBox="1"/>
+          <p:nvPr/>
+        </p:nvSpPr>
+        <p:spPr>
+          <a:xfrm>
+            <a:off x="7393198" y="392369"/>
+            <a:ext cx="4584527" cy="310805"/>
+          </a:xfrm>
+          <a:prstGeom prst="rect">
+            <a:avLst/>
+          </a:prstGeom>
+          <a:noFill/>
+          <a:ln/>
+        </p:spPr>
+        <p:txBody>
+          <a:bodyPr wrap="none" lIns="0" tIns="0" rIns="0" bIns="0" rtlCol="0" anchor="t"/>
+          <a:lstStyle/>
+          <a:p>
+            <a:pPr algn="l" indent="0" marL="0">
+              <a:lnSpc>
+                <a:spcPts val="2447"/>
+              </a:lnSpc>
+              <a:buNone/>
+            </a:pPr>
+            <a:r>
+              <a:rPr lang="en-US" sz="1631" spc="-54" kern="0" dirty="0">
+                <a:solidFill>
+                  <a:srgbClr val="E2E8F0"/>
+                </a:solidFill>
+                <a:latin typeface="Consolas" pitchFamily="34" charset="0"/>
+                <a:ea typeface="Consolas" pitchFamily="34" charset="-122"/>
+                <a:cs typeface="Consolas" pitchFamily="34" charset="-120"/>
+              </a:rPr>
+              <a:t>LATENCY: </a:t>
+            </a:r>
+            <a:pPr algn="l" indent="0" marL="0">
+              <a:lnSpc>
+                <a:spcPts val="2447"/>
+              </a:lnSpc>
+              <a:buNone/>
+            </a:pPr>
+            <a:r>
+              <a:rPr lang="en-US" sz="1631" b="1" spc="-54" kern="0" dirty="0">
+                <a:solidFill>
+                  <a:srgbClr val="FFCC00"/>
+                </a:solidFill>
+                <a:latin typeface="Consolas" pitchFamily="34" charset="0"/>
+                <a:ea typeface="Consolas" pitchFamily="34" charset="-122"/>
+                <a:cs typeface="Consolas" pitchFamily="34" charset="-120"/>
+              </a:rPr>
+              <a:t>380 ns</a:t>
+            </a:r>
+            <a:pPr algn="l" indent="0" marL="0">
+              <a:lnSpc>
+                <a:spcPts val="2447"/>
+              </a:lnSpc>
+              <a:buNone/>
+            </a:pPr>
+            <a:r>
+              <a:rPr lang="en-US" sz="1631" spc="-54" kern="0" dirty="0">
+                <a:solidFill>
+                  <a:srgbClr val="E2E8F0"/>
+                </a:solidFill>
+                <a:latin typeface="Consolas" pitchFamily="34" charset="0"/>
+                <a:ea typeface="Consolas" pitchFamily="34" charset="-122"/>
+                <a:cs typeface="Consolas" pitchFamily="34" charset="-120"/>
+              </a:rPr>
+              <a:t> | STATUS: </a:t>
+            </a:r>
+            <a:pPr algn="l" indent="0" marL="0">
+              <a:lnSpc>
+                <a:spcPts val="2447"/>
+              </a:lnSpc>
+              <a:buNone/>
+            </a:pPr>
+            <a:r>
+              <a:rPr lang="en-US" sz="1631" spc="-54" kern="0" dirty="0">
+                <a:solidFill>
+                  <a:srgbClr val="10B981"/>
+                </a:solidFill>
+                <a:latin typeface="Consolas" pitchFamily="34" charset="0"/>
+                <a:ea typeface="Consolas" pitchFamily="34" charset="-122"/>
+                <a:cs typeface="Consolas" pitchFamily="34" charset="-120"/>
+              </a:rPr>
+              <a:t>ACTIVE ARB</a:t>
+            </a:r>
+            <a:endParaRPr lang="en-US" sz="1631" dirty="0"/>
+          </a:p>
+        </p:txBody>
+      </p:sp>
+      <p:sp>
+        <p:nvSpPr>
+          <p:cNvPr id="6" name="Text 4"/>
+          <p:cNvSpPr txBox="1"/>
+          <p:nvPr/>
+        </p:nvSpPr>
+        <p:spPr>
+          <a:xfrm>
+            <a:off x="400050" y="2402860"/>
+            <a:ext cx="12281124" cy="164592"/>
+          </a:xfrm>
+          <a:prstGeom prst="rect">
+            <a:avLst/>
+          </a:prstGeom>
+          <a:noFill/>
+          <a:ln/>
+        </p:spPr>
+        <p:txBody>
+          <a:bodyPr wrap="none" lIns="0" tIns="0" rIns="0" bIns="0" rtlCol="0" anchor="t"/>
+          <a:lstStyle/>
+          <a:p>
+            <a:pPr algn="l" indent="0" marL="0">
+              <a:lnSpc>
+                <a:spcPts val="1296"/>
+              </a:lnSpc>
+              <a:buNone/>
+            </a:pPr>
+            <a:r>
+              <a:rPr lang="en-US" sz="864" b="1" spc="-54" kern="0" dirty="0">
+                <a:solidFill>
+                  <a:srgbClr val="FFCC00"/>
+                </a:solidFill>
+                <a:latin typeface="Consolas" pitchFamily="34" charset="0"/>
+                <a:ea typeface="Consolas" pitchFamily="34" charset="-122"/>
+                <a:cs typeface="Consolas" pitchFamily="34" charset="-120"/>
+              </a:rPr>
+              <a:t>FPGA TICK-TO-TRADE PIPELINE</a:t>
+            </a:r>
+            <a:endParaRPr lang="en-US" sz="864" dirty="0"/>
+          </a:p>
+        </p:txBody>
+      </p:sp>
+      <p:sp>
+        <p:nvSpPr>
+          <p:cNvPr id="7" name="Text 5"/>
+          <p:cNvSpPr txBox="1"/>
+          <p:nvPr/>
+        </p:nvSpPr>
+        <p:spPr>
+          <a:xfrm>
+            <a:off x="400050" y="2597170"/>
+            <a:ext cx="12281124" cy="400050"/>
+          </a:xfrm>
+          <a:prstGeom prst="rect">
+            <a:avLst/>
+          </a:prstGeom>
+          <a:noFill/>
+          <a:ln/>
+        </p:spPr>
+        <p:txBody>
+          <a:bodyPr wrap="none" lIns="0" tIns="0" rIns="0" bIns="0" rtlCol="0" anchor="t"/>
+          <a:lstStyle/>
+          <a:p>
+            <a:pPr algn="l" indent="0" marL="0">
+              <a:lnSpc>
+                <a:spcPts val="3150"/>
+              </a:lnSpc>
+              <a:buNone/>
+            </a:pPr>
+            <a:r>
+              <a:rPr lang="en-US" sz="2520" b="1" spc="-54" kern="0" dirty="0">
+                <a:solidFill>
+                  <a:srgbClr val="FFFFFF"/>
+                </a:solidFill>
+                <a:latin typeface="Malgun Gothic" pitchFamily="34" charset="0"/>
+                <a:ea typeface="Malgun Gothic" pitchFamily="34" charset="-122"/>
+                <a:cs typeface="Malgun Gothic" pitchFamily="34" charset="-120"/>
+              </a:rPr>
+              <a:t>나노초 초저지연 알고리즘 트레이딩 엔진</a:t>
+            </a:r>
+            <a:endParaRPr lang="en-US" sz="2520" dirty="0"/>
+          </a:p>
+        </p:txBody>
+      </p:sp>
+      <p:sp>
+        <p:nvSpPr>
+          <p:cNvPr id="8" name="Shape 6"/>
+          <p:cNvSpPr/>
+          <p:nvPr/>
+        </p:nvSpPr>
+        <p:spPr>
+          <a:xfrm>
+            <a:off x="419070" y="4776826"/>
+            <a:ext cx="5600700" cy="1738274"/>
+          </a:xfrm>
+          <a:prstGeom prst="roundRect">
+            <a:avLst>
+              <a:gd name="adj" fmla="val 3288"/>
+            </a:avLst>
+          </a:prstGeom>
+          <a:solidFill>
+            <a:srgbClr val="0B1120"/>
+          </a:solidFill>
+          <a:ln w="9525">
+            <a:solidFill>
+              <a:srgbClr val="1E293B"/>
+            </a:solidFill>
+            <a:prstDash val="solid"/>
+          </a:ln>
+        </p:spPr>
+      </p:sp>
+      <p:sp>
+        <p:nvSpPr>
+          <p:cNvPr id="9" name="Shape 7"/>
+          <p:cNvSpPr/>
+          <p:nvPr/>
+        </p:nvSpPr>
+        <p:spPr>
+          <a:xfrm>
+            <a:off x="561990" y="5268590"/>
+            <a:ext cx="5314950" cy="9510"/>
+          </a:xfrm>
+          <a:prstGeom prst="rect">
+            <a:avLst/>
+          </a:prstGeom>
+          <a:solidFill>
+            <a:srgbClr val="1E293B"/>
+          </a:solidFill>
+          <a:ln/>
+        </p:spPr>
+      </p:sp>
+      <p:sp>
+        <p:nvSpPr>
+          <p:cNvPr id="10" name="Text 8"/>
+          <p:cNvSpPr txBox="1"/>
+          <p:nvPr/>
+        </p:nvSpPr>
+        <p:spPr>
+          <a:xfrm>
+            <a:off x="542971" y="4911974"/>
+            <a:ext cx="5759166" cy="310805"/>
+          </a:xfrm>
+          <a:prstGeom prst="rect">
+            <a:avLst/>
+          </a:prstGeom>
+          <a:noFill/>
+          <a:ln/>
+        </p:spPr>
+        <p:txBody>
+          <a:bodyPr wrap="none" lIns="0" tIns="0" rIns="0" bIns="0" rtlCol="0" anchor="t"/>
+          <a:lstStyle/>
+          <a:p>
+            <a:pPr algn="l" indent="0" marL="0">
+              <a:lnSpc>
+                <a:spcPts val="2447"/>
+              </a:lnSpc>
+              <a:buNone/>
+            </a:pPr>
+            <a:r>
+              <a:rPr lang="en-US" sz="1631" b="1" spc="-54" kern="0" dirty="0">
+                <a:solidFill>
+                  <a:srgbClr val="94A3B8"/>
+                </a:solidFill>
+                <a:latin typeface="Consolas" pitchFamily="34" charset="0"/>
+                <a:ea typeface="Consolas" pitchFamily="34" charset="-122"/>
+                <a:cs typeface="Consolas" pitchFamily="34" charset="-120"/>
+              </a:rPr>
+              <a:t>L3 ORDERBOOK DEPTH STREAM</a:t>
+            </a:r>
+            <a:endParaRPr lang="en-US" sz="1631" dirty="0"/>
+          </a:p>
+        </p:txBody>
+      </p:sp>
+      <p:sp>
+        <p:nvSpPr>
+          <p:cNvPr id="11" name="Text 9"/>
+          <p:cNvSpPr txBox="1"/>
+          <p:nvPr/>
+        </p:nvSpPr>
+        <p:spPr>
+          <a:xfrm>
+            <a:off x="542971" y="5346497"/>
+            <a:ext cx="3062600" cy="310805"/>
+          </a:xfrm>
+          <a:prstGeom prst="rect">
+            <a:avLst/>
+          </a:prstGeom>
+          <a:noFill/>
+          <a:ln/>
+        </p:spPr>
+        <p:txBody>
+          <a:bodyPr wrap="none" lIns="0" tIns="0" rIns="0" bIns="0" rtlCol="0" anchor="t"/>
+          <a:lstStyle/>
+          <a:p>
+            <a:pPr algn="l" indent="0" marL="0">
+              <a:lnSpc>
+                <a:spcPts val="2447"/>
+              </a:lnSpc>
+              <a:buNone/>
+            </a:pPr>
+            <a:r>
+              <a:rPr lang="en-US" sz="1631" spc="-54" kern="0" dirty="0">
+                <a:solidFill>
+                  <a:srgbClr val="10B981"/>
+                </a:solidFill>
+                <a:latin typeface="Consolas" pitchFamily="34" charset="0"/>
+                <a:ea typeface="Consolas" pitchFamily="34" charset="-122"/>
+                <a:cs typeface="Consolas" pitchFamily="34" charset="-120"/>
+              </a:rPr>
+              <a:t>BID 19,842.25 [142 LOTS]</a:t>
+            </a:r>
+            <a:endParaRPr lang="en-US" sz="1631" dirty="0"/>
+          </a:p>
+        </p:txBody>
+      </p:sp>
+      <p:sp>
+        <p:nvSpPr>
+          <p:cNvPr id="12" name="Text 10"/>
+          <p:cNvSpPr txBox="1"/>
+          <p:nvPr/>
+        </p:nvSpPr>
+        <p:spPr>
+          <a:xfrm>
+            <a:off x="5035875" y="5346497"/>
+            <a:ext cx="906810" cy="310805"/>
+          </a:xfrm>
+          <a:prstGeom prst="rect">
+            <a:avLst/>
+          </a:prstGeom>
+          <a:noFill/>
+          <a:ln/>
+        </p:spPr>
+        <p:txBody>
+          <a:bodyPr wrap="none" lIns="0" tIns="0" rIns="0" bIns="0" rtlCol="0" anchor="t"/>
+          <a:lstStyle/>
+          <a:p>
+            <a:pPr algn="l" indent="0" marL="0">
+              <a:lnSpc>
+                <a:spcPts val="2447"/>
+              </a:lnSpc>
+              <a:buNone/>
+            </a:pPr>
+            <a:r>
+              <a:rPr lang="en-US" sz="1631" spc="-54" kern="0" dirty="0">
+                <a:solidFill>
+                  <a:srgbClr val="10B981"/>
+                </a:solidFill>
+                <a:latin typeface="Consolas" pitchFamily="34" charset="0"/>
+                <a:ea typeface="Consolas" pitchFamily="34" charset="-122"/>
+                <a:cs typeface="Consolas" pitchFamily="34" charset="-120"/>
+              </a:rPr>
+              <a:t>0.12 μs</a:t>
+            </a:r>
+            <a:endParaRPr lang="en-US" sz="1631" dirty="0"/>
+          </a:p>
+        </p:txBody>
+      </p:sp>
+      <p:sp>
+        <p:nvSpPr>
+          <p:cNvPr id="13" name="Text 11"/>
+          <p:cNvSpPr txBox="1"/>
+          <p:nvPr/>
+        </p:nvSpPr>
+        <p:spPr>
+          <a:xfrm>
+            <a:off x="542971" y="5685831"/>
+            <a:ext cx="3062600" cy="310805"/>
+          </a:xfrm>
+          <a:prstGeom prst="rect">
+            <a:avLst/>
+          </a:prstGeom>
+          <a:noFill/>
+          <a:ln/>
+        </p:spPr>
+        <p:txBody>
+          <a:bodyPr wrap="none" lIns="0" tIns="0" rIns="0" bIns="0" rtlCol="0" anchor="t"/>
+          <a:lstStyle/>
+          <a:p>
+            <a:pPr algn="l" indent="0" marL="0">
+              <a:lnSpc>
+                <a:spcPts val="2447"/>
+              </a:lnSpc>
+              <a:buNone/>
+            </a:pPr>
+            <a:r>
+              <a:rPr lang="en-US" sz="1631" spc="-54" kern="0" dirty="0">
+                <a:solidFill>
+                  <a:srgbClr val="10B981"/>
+                </a:solidFill>
+                <a:latin typeface="Consolas" pitchFamily="34" charset="0"/>
+                <a:ea typeface="Consolas" pitchFamily="34" charset="-122"/>
+                <a:cs typeface="Consolas" pitchFamily="34" charset="-120"/>
+              </a:rPr>
+              <a:t>BID 19,842.00 [380 LOTS]</a:t>
+            </a:r>
+            <a:endParaRPr lang="en-US" sz="1631" dirty="0"/>
+          </a:p>
+        </p:txBody>
+      </p:sp>
+      <p:sp>
+        <p:nvSpPr>
+          <p:cNvPr id="14" name="Text 12"/>
+          <p:cNvSpPr txBox="1"/>
+          <p:nvPr/>
+        </p:nvSpPr>
+        <p:spPr>
+          <a:xfrm>
+            <a:off x="5035875" y="5685831"/>
+            <a:ext cx="906810" cy="310805"/>
+          </a:xfrm>
+          <a:prstGeom prst="rect">
+            <a:avLst/>
+          </a:prstGeom>
+          <a:noFill/>
+          <a:ln/>
+        </p:spPr>
+        <p:txBody>
+          <a:bodyPr wrap="none" lIns="0" tIns="0" rIns="0" bIns="0" rtlCol="0" anchor="t"/>
+          <a:lstStyle/>
+          <a:p>
+            <a:pPr algn="l" indent="0" marL="0">
+              <a:lnSpc>
+                <a:spcPts val="2447"/>
+              </a:lnSpc>
+              <a:buNone/>
+            </a:pPr>
+            <a:r>
+              <a:rPr lang="en-US" sz="1631" spc="-54" kern="0" dirty="0">
+                <a:solidFill>
+                  <a:srgbClr val="10B981"/>
+                </a:solidFill>
+                <a:latin typeface="Consolas" pitchFamily="34" charset="0"/>
+                <a:ea typeface="Consolas" pitchFamily="34" charset="-122"/>
+                <a:cs typeface="Consolas" pitchFamily="34" charset="-120"/>
+              </a:rPr>
+              <a:t>0.18 μs</a:t>
+            </a:r>
+            <a:endParaRPr lang="en-US" sz="1631" dirty="0"/>
+          </a:p>
+        </p:txBody>
+      </p:sp>
+      <p:sp>
+        <p:nvSpPr>
+          <p:cNvPr id="15" name="Text 13"/>
+          <p:cNvSpPr txBox="1"/>
+          <p:nvPr/>
+        </p:nvSpPr>
+        <p:spPr>
+          <a:xfrm>
+            <a:off x="542971" y="6025164"/>
+            <a:ext cx="2935681" cy="310805"/>
+          </a:xfrm>
+          <a:prstGeom prst="rect">
+            <a:avLst/>
+          </a:prstGeom>
+          <a:noFill/>
+          <a:ln/>
+        </p:spPr>
+        <p:txBody>
+          <a:bodyPr wrap="none" lIns="0" tIns="0" rIns="0" bIns="0" rtlCol="0" anchor="t"/>
+          <a:lstStyle/>
+          <a:p>
+            <a:pPr algn="l" indent="0" marL="0">
+              <a:lnSpc>
+                <a:spcPts val="2447"/>
+              </a:lnSpc>
+              <a:buNone/>
+            </a:pPr>
+            <a:r>
+              <a:rPr lang="en-US" sz="1631" spc="-54" kern="0" dirty="0">
+                <a:solidFill>
+                  <a:srgbClr val="EF4444"/>
+                </a:solidFill>
+                <a:latin typeface="Consolas" pitchFamily="34" charset="0"/>
+                <a:ea typeface="Consolas" pitchFamily="34" charset="-122"/>
+                <a:cs typeface="Consolas" pitchFamily="34" charset="-120"/>
+              </a:rPr>
+              <a:t>ASK 19,842.50 [98 LOTS]</a:t>
+            </a:r>
+            <a:endParaRPr lang="en-US" sz="1631" dirty="0"/>
+          </a:p>
+        </p:txBody>
+      </p:sp>
+      <p:sp>
+        <p:nvSpPr>
+          <p:cNvPr id="16" name="Text 14"/>
+          <p:cNvSpPr txBox="1"/>
+          <p:nvPr/>
+        </p:nvSpPr>
+        <p:spPr>
+          <a:xfrm>
+            <a:off x="5035875" y="6025164"/>
+            <a:ext cx="906810" cy="310805"/>
+          </a:xfrm>
+          <a:prstGeom prst="rect">
+            <a:avLst/>
+          </a:prstGeom>
+          <a:noFill/>
+          <a:ln/>
+        </p:spPr>
+        <p:txBody>
+          <a:bodyPr wrap="none" lIns="0" tIns="0" rIns="0" bIns="0" rtlCol="0" anchor="t"/>
+          <a:lstStyle/>
+          <a:p>
+            <a:pPr algn="l" indent="0" marL="0">
+              <a:lnSpc>
+                <a:spcPts val="2447"/>
+              </a:lnSpc>
+              <a:buNone/>
+            </a:pPr>
+            <a:r>
+              <a:rPr lang="en-US" sz="1631" spc="-54" kern="0" dirty="0">
+                <a:solidFill>
+                  <a:srgbClr val="EF4444"/>
+                </a:solidFill>
+                <a:latin typeface="Consolas" pitchFamily="34" charset="0"/>
+                <a:ea typeface="Consolas" pitchFamily="34" charset="-122"/>
+                <a:cs typeface="Consolas" pitchFamily="34" charset="-120"/>
+              </a:rPr>
+              <a:t>0.09 μs</a:t>
+            </a:r>
+            <a:endParaRPr lang="en-US" sz="1631" dirty="0"/>
+          </a:p>
+        </p:txBody>
+      </p:sp>
+      <p:sp>
+        <p:nvSpPr>
+          <p:cNvPr id="17" name="Shape 15"/>
+          <p:cNvSpPr/>
+          <p:nvPr/>
+        </p:nvSpPr>
+        <p:spPr>
+          <a:xfrm>
+            <a:off x="6172200" y="4776826"/>
+            <a:ext cx="5600700" cy="1738274"/>
+          </a:xfrm>
+          <a:prstGeom prst="roundRect">
+            <a:avLst>
+              <a:gd name="adj" fmla="val 3288"/>
+            </a:avLst>
+          </a:prstGeom>
+          <a:solidFill>
+            <a:srgbClr val="0F172A"/>
+          </a:solidFill>
+          <a:ln/>
+        </p:spPr>
+      </p:sp>
+      <p:sp>
+        <p:nvSpPr>
+          <p:cNvPr id="18" name="Text 16"/>
+          <p:cNvSpPr txBox="1"/>
+          <p:nvPr/>
+        </p:nvSpPr>
+        <p:spPr>
+          <a:xfrm>
+            <a:off x="6324630" y="5007803"/>
+            <a:ext cx="5697444" cy="164592"/>
+          </a:xfrm>
+          <a:prstGeom prst="rect">
+            <a:avLst/>
+          </a:prstGeom>
+          <a:noFill/>
+          <a:ln/>
+        </p:spPr>
+        <p:txBody>
+          <a:bodyPr wrap="none" lIns="0" tIns="0" rIns="0" bIns="0" rtlCol="0" anchor="t"/>
+          <a:lstStyle/>
+          <a:p>
+            <a:pPr algn="l" indent="0" marL="0">
+              <a:lnSpc>
+                <a:spcPts val="1296"/>
+              </a:lnSpc>
+              <a:buNone/>
+            </a:pPr>
+            <a:r>
+              <a:rPr lang="en-US" sz="864" spc="-54" kern="0" dirty="0">
+                <a:solidFill>
+                  <a:srgbClr val="94A3B8"/>
+                </a:solidFill>
+                <a:latin typeface="Consolas" pitchFamily="34" charset="0"/>
+                <a:ea typeface="Consolas" pitchFamily="34" charset="-122"/>
+                <a:cs typeface="Consolas" pitchFamily="34" charset="-120"/>
+              </a:rPr>
+              <a:t>ANNUALIZED SHARPE RATIO</a:t>
+            </a:r>
+            <a:endParaRPr lang="en-US" sz="864" dirty="0"/>
+          </a:p>
+        </p:txBody>
+      </p:sp>
+      <p:sp>
+        <p:nvSpPr>
+          <p:cNvPr id="19" name="Text 17"/>
+          <p:cNvSpPr txBox="1"/>
+          <p:nvPr/>
+        </p:nvSpPr>
+        <p:spPr>
+          <a:xfrm>
+            <a:off x="6324630" y="5164988"/>
+            <a:ext cx="5697444" cy="502920"/>
+          </a:xfrm>
+          <a:prstGeom prst="rect">
+            <a:avLst/>
+          </a:prstGeom>
+          <a:noFill/>
+          <a:ln/>
+        </p:spPr>
+        <p:txBody>
+          <a:bodyPr wrap="none" lIns="0" tIns="0" rIns="0" bIns="0" rtlCol="0" anchor="t"/>
+          <a:lstStyle/>
+          <a:p>
+            <a:pPr algn="l" indent="0" marL="0">
+              <a:lnSpc>
+                <a:spcPts val="3960"/>
+              </a:lnSpc>
+              <a:buNone/>
+            </a:pPr>
+            <a:r>
+              <a:rPr lang="en-US" sz="2640" b="1" spc="-54" kern="0" dirty="0">
+                <a:solidFill>
+                  <a:srgbClr val="FFCC00"/>
+                </a:solidFill>
+                <a:latin typeface="Consolas" pitchFamily="34" charset="0"/>
+                <a:ea typeface="Consolas" pitchFamily="34" charset="-122"/>
+                <a:cs typeface="Consolas" pitchFamily="34" charset="-120"/>
+              </a:rPr>
+              <a:t>4.28 SR</a:t>
+            </a:r>
+            <a:endParaRPr lang="en-US" sz="2640" dirty="0"/>
+          </a:p>
+        </p:txBody>
+      </p:sp>
+      <p:sp>
+        <p:nvSpPr>
+          <p:cNvPr id="20" name="Text 18"/>
+          <p:cNvSpPr txBox="1"/>
+          <p:nvPr/>
+        </p:nvSpPr>
+        <p:spPr>
+          <a:xfrm>
+            <a:off x="6324630" y="5796839"/>
+            <a:ext cx="5697444" cy="164592"/>
+          </a:xfrm>
+          <a:prstGeom prst="rect">
+            <a:avLst/>
+          </a:prstGeom>
+          <a:noFill/>
+          <a:ln/>
+        </p:spPr>
+        <p:txBody>
+          <a:bodyPr wrap="none" lIns="0" tIns="0" rIns="0" bIns="0" rtlCol="0" anchor="t"/>
+          <a:lstStyle/>
+          <a:p>
+            <a:pPr algn="l" indent="0" marL="0">
+              <a:lnSpc>
+                <a:spcPts val="1296"/>
+              </a:lnSpc>
+              <a:buNone/>
+            </a:pPr>
+            <a:r>
+              <a:rPr lang="en-US" sz="864" spc="-54" kern="0" dirty="0">
+                <a:solidFill>
+                  <a:srgbClr val="94A3B8"/>
+                </a:solidFill>
+                <a:latin typeface="Consolas" pitchFamily="34" charset="0"/>
+                <a:ea typeface="Consolas" pitchFamily="34" charset="-122"/>
+                <a:cs typeface="Consolas" pitchFamily="34" charset="-120"/>
+              </a:rPr>
+              <a:t>DAILY VOLUME PROCESSED</a:t>
+            </a:r>
+            <a:endParaRPr lang="en-US" sz="864" dirty="0"/>
+          </a:p>
+        </p:txBody>
+      </p:sp>
+      <p:sp>
+        <p:nvSpPr>
+          <p:cNvPr id="21" name="Text 19"/>
+          <p:cNvSpPr txBox="1"/>
+          <p:nvPr/>
+        </p:nvSpPr>
+        <p:spPr>
+          <a:xfrm>
+            <a:off x="6324630" y="5959785"/>
+            <a:ext cx="5697444" cy="320040"/>
+          </a:xfrm>
+          <a:prstGeom prst="rect">
+            <a:avLst/>
+          </a:prstGeom>
+          <a:noFill/>
+          <a:ln/>
+        </p:spPr>
+        <p:txBody>
+          <a:bodyPr wrap="none" lIns="0" tIns="0" rIns="0" bIns="0" rtlCol="0" anchor="t"/>
+          <a:lstStyle/>
+          <a:p>
+            <a:pPr algn="l" indent="0" marL="0">
+              <a:lnSpc>
+                <a:spcPts val="2520"/>
+              </a:lnSpc>
+              <a:buNone/>
+            </a:pPr>
+            <a:r>
+              <a:rPr lang="en-US" sz="1680" b="1" spc="-54" kern="0" dirty="0">
+                <a:solidFill>
+                  <a:srgbClr val="FFFFFF"/>
+                </a:solidFill>
+                <a:latin typeface="Consolas" pitchFamily="34" charset="0"/>
+                <a:ea typeface="Consolas" pitchFamily="34" charset="-122"/>
+                <a:cs typeface="Consolas" pitchFamily="34" charset="-120"/>
+              </a:rPr>
+              <a:t>$4,850,000,000</a:t>
+            </a:r>
+            <a:endParaRPr lang="en-US" sz="1680" dirty="0"/>
+          </a:p>
+        </p:txBody>
+      </p:sp>
     </p:spTree>
   </p:cSld>
   <p:clrMapOvr>
@@ -985,16 +1801,9 @@
   <p:cSld name="Slide 2">
     <p:bg>
       <p:bgPr>
-        <a:blipFill dpi="0" rotWithShape="1">
-          <a:blip r:embed="rId1">
-            <a:lum/>
-          </a:blip>
-          <a:srcRect/>
-          <a:stretch>
-            <a:fillRect/>
-          </a:stretch>
-        </a:blipFill>
-        <a:effectLst/>
+        <a:solidFill>
+          <a:srgbClr val="060A14"/>
+        </a:solidFill>
       </p:bgPr>
     </p:bg>
     <p:spTree>
@@ -1011,6 +1820,915 @@
           <a:chExt cx="0" cy="0"/>
         </a:xfrm>
       </p:grpSpPr>
+      <p:sp>
+        <p:nvSpPr>
+          <p:cNvPr id="2" name="Shape 0"/>
+          <p:cNvSpPr/>
+          <p:nvPr/>
+        </p:nvSpPr>
+        <p:spPr>
+          <a:xfrm>
+            <a:off x="419070" y="342900"/>
+            <a:ext cx="11353830" cy="444124"/>
+          </a:xfrm>
+          <a:prstGeom prst="rect">
+            <a:avLst/>
+          </a:prstGeom>
+          <a:solidFill>
+            <a:srgbClr val="0F172A"/>
+          </a:solidFill>
+          <a:ln/>
+        </p:spPr>
+      </p:sp>
+      <p:sp>
+        <p:nvSpPr>
+          <p:cNvPr id="3" name="Shape 1"/>
+          <p:cNvSpPr/>
+          <p:nvPr/>
+        </p:nvSpPr>
+        <p:spPr>
+          <a:xfrm>
+            <a:off x="419070" y="768005"/>
+            <a:ext cx="11353830" cy="19020"/>
+          </a:xfrm>
+          <a:prstGeom prst="rect">
+            <a:avLst/>
+          </a:prstGeom>
+          <a:solidFill>
+            <a:srgbClr val="FFCC00"/>
+          </a:solidFill>
+          <a:ln/>
+        </p:spPr>
+      </p:sp>
+      <p:sp>
+        <p:nvSpPr>
+          <p:cNvPr id="4" name="Text 2"/>
+          <p:cNvSpPr txBox="1"/>
+          <p:nvPr/>
+        </p:nvSpPr>
+        <p:spPr>
+          <a:xfrm>
+            <a:off x="533370" y="392369"/>
+            <a:ext cx="7247443" cy="310805"/>
+          </a:xfrm>
+          <a:prstGeom prst="rect">
+            <a:avLst/>
+          </a:prstGeom>
+          <a:noFill/>
+          <a:ln/>
+        </p:spPr>
+        <p:txBody>
+          <a:bodyPr wrap="none" lIns="0" tIns="0" rIns="0" bIns="0" rtlCol="0" anchor="t"/>
+          <a:lstStyle/>
+          <a:p>
+            <a:pPr algn="l" indent="0" marL="0">
+              <a:lnSpc>
+                <a:spcPts val="2447"/>
+              </a:lnSpc>
+              <a:buNone/>
+            </a:pPr>
+            <a:r>
+              <a:rPr lang="en-US" sz="1631" b="1" spc="-54" kern="0" dirty="0">
+                <a:solidFill>
+                  <a:srgbClr val="E2E8F0"/>
+                </a:solidFill>
+                <a:latin typeface="Consolas" pitchFamily="34" charset="0"/>
+                <a:ea typeface="Consolas" pitchFamily="34" charset="-122"/>
+                <a:cs typeface="Consolas" pitchFamily="34" charset="-120"/>
+              </a:rPr>
+              <a:t>EXECUTION LATENCY BREAKDOWN</a:t>
+            </a:r>
+            <a:pPr algn="l" indent="0" marL="0">
+              <a:lnSpc>
+                <a:spcPts val="2447"/>
+              </a:lnSpc>
+              <a:buNone/>
+            </a:pPr>
+            <a:r>
+              <a:rPr lang="en-US" sz="1631" spc="-54" kern="0" dirty="0">
+                <a:solidFill>
+                  <a:srgbClr val="E2E8F0"/>
+                </a:solidFill>
+                <a:latin typeface="Consolas" pitchFamily="34" charset="0"/>
+                <a:ea typeface="Consolas" pitchFamily="34" charset="-122"/>
+                <a:cs typeface="Consolas" pitchFamily="34" charset="-120"/>
+              </a:rPr>
+              <a:t> // FIBER OPTIC VS DIRECT FPGA</a:t>
+            </a:r>
+            <a:endParaRPr lang="en-US" sz="1631" dirty="0"/>
+          </a:p>
+        </p:txBody>
+      </p:sp>
+      <p:sp>
+        <p:nvSpPr>
+          <p:cNvPr id="5" name="Text 3"/>
+          <p:cNvSpPr txBox="1"/>
+          <p:nvPr/>
+        </p:nvSpPr>
+        <p:spPr>
+          <a:xfrm>
+            <a:off x="9859152" y="392369"/>
+            <a:ext cx="1921337" cy="310805"/>
+          </a:xfrm>
+          <a:prstGeom prst="rect">
+            <a:avLst/>
+          </a:prstGeom>
+          <a:noFill/>
+          <a:ln/>
+        </p:spPr>
+        <p:txBody>
+          <a:bodyPr wrap="none" lIns="0" tIns="0" rIns="0" bIns="0" rtlCol="0" anchor="t"/>
+          <a:lstStyle/>
+          <a:p>
+            <a:pPr algn="l" indent="0" marL="0">
+              <a:lnSpc>
+                <a:spcPts val="2447"/>
+              </a:lnSpc>
+              <a:buNone/>
+            </a:pPr>
+            <a:r>
+              <a:rPr lang="en-US" sz="1631" spc="-54" kern="0" dirty="0">
+                <a:solidFill>
+                  <a:srgbClr val="FFCC00"/>
+                </a:solidFill>
+                <a:latin typeface="Consolas" pitchFamily="34" charset="0"/>
+                <a:ea typeface="Consolas" pitchFamily="34" charset="-122"/>
+                <a:cs typeface="Consolas" pitchFamily="34" charset="-120"/>
+              </a:rPr>
+              <a:t>TARGET &lt; 500 ns</a:t>
+            </a:r>
+            <a:endParaRPr lang="en-US" sz="1631" dirty="0"/>
+          </a:p>
+        </p:txBody>
+      </p:sp>
+      <p:sp>
+        <p:nvSpPr>
+          <p:cNvPr id="6" name="Text 4"/>
+          <p:cNvSpPr txBox="1"/>
+          <p:nvPr/>
+        </p:nvSpPr>
+        <p:spPr>
+          <a:xfrm>
+            <a:off x="400050" y="2160361"/>
+            <a:ext cx="12281124" cy="285750"/>
+          </a:xfrm>
+          <a:prstGeom prst="rect">
+            <a:avLst/>
+          </a:prstGeom>
+          <a:noFill/>
+          <a:ln/>
+        </p:spPr>
+        <p:txBody>
+          <a:bodyPr wrap="none" lIns="0" tIns="0" rIns="0" bIns="0" rtlCol="0" anchor="t"/>
+          <a:lstStyle/>
+          <a:p>
+            <a:pPr algn="l" indent="0" marL="0">
+              <a:lnSpc>
+                <a:spcPts val="2250"/>
+              </a:lnSpc>
+              <a:buNone/>
+            </a:pPr>
+            <a:r>
+              <a:rPr lang="en-US" sz="1800" b="1" spc="-54" kern="0" dirty="0">
+                <a:solidFill>
+                  <a:srgbClr val="FFFFFF"/>
+                </a:solidFill>
+                <a:latin typeface="Malgun Gothic" pitchFamily="34" charset="0"/>
+                <a:ea typeface="Malgun Gothic" pitchFamily="34" charset="-122"/>
+                <a:cs typeface="Malgun Gothic" pitchFamily="34" charset="-120"/>
+              </a:rPr>
+              <a:t>3단계 하드웨어 직접 가속 틱투트레이드 파이프라인</a:t>
+            </a:r>
+            <a:endParaRPr lang="en-US" sz="1800" dirty="0"/>
+          </a:p>
+        </p:txBody>
+      </p:sp>
+      <p:sp>
+        <p:nvSpPr>
+          <p:cNvPr id="7" name="Shape 5"/>
+          <p:cNvSpPr/>
+          <p:nvPr/>
+        </p:nvSpPr>
+        <p:spPr>
+          <a:xfrm>
+            <a:off x="419070" y="3992636"/>
+            <a:ext cx="3695730" cy="1037112"/>
+          </a:xfrm>
+          <a:prstGeom prst="roundRect">
+            <a:avLst>
+              <a:gd name="adj" fmla="val 5510"/>
+            </a:avLst>
+          </a:prstGeom>
+          <a:solidFill>
+            <a:srgbClr val="0B1120"/>
+          </a:solidFill>
+          <a:ln/>
+        </p:spPr>
+      </p:sp>
+      <p:sp>
+        <p:nvSpPr>
+          <p:cNvPr id="8" name="Shape 6"/>
+          <p:cNvSpPr/>
+          <p:nvPr/>
+        </p:nvSpPr>
+        <p:spPr>
+          <a:xfrm>
+            <a:off x="419070" y="3992636"/>
+            <a:ext cx="3695730" cy="28621"/>
+          </a:xfrm>
+          <a:prstGeom prst="rect">
+            <a:avLst/>
+          </a:prstGeom>
+          <a:solidFill>
+            <a:srgbClr val="10B981"/>
+          </a:solidFill>
+          <a:ln/>
+        </p:spPr>
+      </p:sp>
+      <p:sp>
+        <p:nvSpPr>
+          <p:cNvPr id="9" name="Shape 7"/>
+          <p:cNvSpPr/>
+          <p:nvPr/>
+        </p:nvSpPr>
+        <p:spPr>
+          <a:xfrm>
+            <a:off x="4105290" y="3992636"/>
+            <a:ext cx="9510" cy="1037112"/>
+          </a:xfrm>
+          <a:prstGeom prst="rect">
+            <a:avLst/>
+          </a:prstGeom>
+          <a:solidFill>
+            <a:srgbClr val="1E293B"/>
+          </a:solidFill>
+          <a:ln/>
+        </p:spPr>
+      </p:sp>
+      <p:sp>
+        <p:nvSpPr>
+          <p:cNvPr id="10" name="Shape 8"/>
+          <p:cNvSpPr/>
+          <p:nvPr/>
+        </p:nvSpPr>
+        <p:spPr>
+          <a:xfrm>
+            <a:off x="419070" y="5020147"/>
+            <a:ext cx="3695730" cy="9510"/>
+          </a:xfrm>
+          <a:prstGeom prst="rect">
+            <a:avLst/>
+          </a:prstGeom>
+          <a:solidFill>
+            <a:srgbClr val="1E293B"/>
+          </a:solidFill>
+          <a:ln/>
+        </p:spPr>
+      </p:sp>
+      <p:sp>
+        <p:nvSpPr>
+          <p:cNvPr id="11" name="Shape 9"/>
+          <p:cNvSpPr/>
+          <p:nvPr/>
+        </p:nvSpPr>
+        <p:spPr>
+          <a:xfrm>
+            <a:off x="419070" y="3992636"/>
+            <a:ext cx="9510" cy="1037112"/>
+          </a:xfrm>
+          <a:prstGeom prst="rect">
+            <a:avLst/>
+          </a:prstGeom>
+          <a:solidFill>
+            <a:srgbClr val="1E293B"/>
+          </a:solidFill>
+          <a:ln/>
+        </p:spPr>
+      </p:sp>
+      <p:sp>
+        <p:nvSpPr>
+          <p:cNvPr id="12" name="Text 10"/>
+          <p:cNvSpPr txBox="1"/>
+          <p:nvPr/>
+        </p:nvSpPr>
+        <p:spPr>
+          <a:xfrm>
+            <a:off x="542971" y="4153205"/>
+            <a:ext cx="3701766" cy="164592"/>
+          </a:xfrm>
+          <a:prstGeom prst="rect">
+            <a:avLst/>
+          </a:prstGeom>
+          <a:noFill/>
+          <a:ln/>
+        </p:spPr>
+        <p:txBody>
+          <a:bodyPr wrap="none" lIns="0" tIns="0" rIns="0" bIns="0" rtlCol="0" anchor="t"/>
+          <a:lstStyle/>
+          <a:p>
+            <a:pPr algn="l" indent="0" marL="0">
+              <a:lnSpc>
+                <a:spcPts val="1296"/>
+              </a:lnSpc>
+              <a:buNone/>
+            </a:pPr>
+            <a:r>
+              <a:rPr lang="en-US" sz="864" spc="-54" kern="0" dirty="0">
+                <a:solidFill>
+                  <a:srgbClr val="10B981"/>
+                </a:solidFill>
+                <a:latin typeface="Consolas" pitchFamily="34" charset="0"/>
+                <a:ea typeface="Consolas" pitchFamily="34" charset="-122"/>
+                <a:cs typeface="Consolas" pitchFamily="34" charset="-120"/>
+              </a:rPr>
+              <a:t>PHASE 1: PACKET INGEST</a:t>
+            </a:r>
+            <a:endParaRPr lang="en-US" sz="864" dirty="0"/>
+          </a:p>
+        </p:txBody>
+      </p:sp>
+      <p:sp>
+        <p:nvSpPr>
+          <p:cNvPr id="13" name="Text 11"/>
+          <p:cNvSpPr txBox="1"/>
+          <p:nvPr/>
+        </p:nvSpPr>
+        <p:spPr>
+          <a:xfrm>
+            <a:off x="542971" y="4354281"/>
+            <a:ext cx="3701766" cy="320040"/>
+          </a:xfrm>
+          <a:prstGeom prst="rect">
+            <a:avLst/>
+          </a:prstGeom>
+          <a:noFill/>
+          <a:ln/>
+        </p:spPr>
+        <p:txBody>
+          <a:bodyPr wrap="none" lIns="0" tIns="0" rIns="0" bIns="0" rtlCol="0" anchor="t"/>
+          <a:lstStyle/>
+          <a:p>
+            <a:pPr algn="l" indent="0" marL="0">
+              <a:lnSpc>
+                <a:spcPts val="2520"/>
+              </a:lnSpc>
+              <a:buNone/>
+            </a:pPr>
+            <a:r>
+              <a:rPr lang="en-US" sz="1680" b="1" spc="-54" kern="0" dirty="0">
+                <a:solidFill>
+                  <a:srgbClr val="FFFFFF"/>
+                </a:solidFill>
+                <a:latin typeface="Consolas" pitchFamily="34" charset="0"/>
+                <a:ea typeface="Consolas" pitchFamily="34" charset="-122"/>
+                <a:cs typeface="Consolas" pitchFamily="34" charset="-120"/>
+              </a:rPr>
+              <a:t>90 ns</a:t>
+            </a:r>
+            <a:endParaRPr lang="en-US" sz="1680" dirty="0"/>
+          </a:p>
+        </p:txBody>
+      </p:sp>
+      <p:sp>
+        <p:nvSpPr>
+          <p:cNvPr id="14" name="Text 12"/>
+          <p:cNvSpPr txBox="1"/>
+          <p:nvPr/>
+        </p:nvSpPr>
+        <p:spPr>
+          <a:xfrm>
+            <a:off x="542971" y="4715378"/>
+            <a:ext cx="3701766" cy="171450"/>
+          </a:xfrm>
+          <a:prstGeom prst="rect">
+            <a:avLst/>
+          </a:prstGeom>
+          <a:noFill/>
+          <a:ln/>
+        </p:spPr>
+        <p:txBody>
+          <a:bodyPr wrap="none" lIns="0" tIns="0" rIns="0" bIns="0" rtlCol="0" anchor="t"/>
+          <a:lstStyle/>
+          <a:p>
+            <a:pPr algn="l" indent="0" marL="0">
+              <a:lnSpc>
+                <a:spcPts val="1350"/>
+              </a:lnSpc>
+              <a:buNone/>
+            </a:pPr>
+            <a:r>
+              <a:rPr lang="en-US" sz="900" spc="-54" kern="0" dirty="0">
+                <a:solidFill>
+                  <a:srgbClr val="94A3B8"/>
+                </a:solidFill>
+                <a:latin typeface="Consolas" pitchFamily="34" charset="0"/>
+                <a:ea typeface="Consolas" pitchFamily="34" charset="-122"/>
+                <a:cs typeface="Consolas" pitchFamily="34" charset="-120"/>
+              </a:rPr>
+              <a:t>Solarflare 커널 바이패스</a:t>
+            </a:r>
+            <a:endParaRPr lang="en-US" sz="900" dirty="0"/>
+          </a:p>
+        </p:txBody>
+      </p:sp>
+      <p:sp>
+        <p:nvSpPr>
+          <p:cNvPr id="15" name="Shape 13"/>
+          <p:cNvSpPr/>
+          <p:nvPr/>
+        </p:nvSpPr>
+        <p:spPr>
+          <a:xfrm>
+            <a:off x="4248120" y="3992636"/>
+            <a:ext cx="3695730" cy="1037112"/>
+          </a:xfrm>
+          <a:prstGeom prst="roundRect">
+            <a:avLst>
+              <a:gd name="adj" fmla="val 5510"/>
+            </a:avLst>
+          </a:prstGeom>
+          <a:solidFill>
+            <a:srgbClr val="0B1120"/>
+          </a:solidFill>
+          <a:ln/>
+        </p:spPr>
+      </p:sp>
+      <p:sp>
+        <p:nvSpPr>
+          <p:cNvPr id="16" name="Shape 14"/>
+          <p:cNvSpPr/>
+          <p:nvPr/>
+        </p:nvSpPr>
+        <p:spPr>
+          <a:xfrm>
+            <a:off x="4248120" y="3992636"/>
+            <a:ext cx="3695730" cy="28621"/>
+          </a:xfrm>
+          <a:prstGeom prst="rect">
+            <a:avLst/>
+          </a:prstGeom>
+          <a:solidFill>
+            <a:srgbClr val="FFCC00"/>
+          </a:solidFill>
+          <a:ln/>
+        </p:spPr>
+      </p:sp>
+      <p:sp>
+        <p:nvSpPr>
+          <p:cNvPr id="17" name="Shape 15"/>
+          <p:cNvSpPr/>
+          <p:nvPr/>
+        </p:nvSpPr>
+        <p:spPr>
+          <a:xfrm>
+            <a:off x="7934340" y="3992636"/>
+            <a:ext cx="9510" cy="1037112"/>
+          </a:xfrm>
+          <a:prstGeom prst="rect">
+            <a:avLst/>
+          </a:prstGeom>
+          <a:solidFill>
+            <a:srgbClr val="1E293B"/>
+          </a:solidFill>
+          <a:ln/>
+        </p:spPr>
+      </p:sp>
+      <p:sp>
+        <p:nvSpPr>
+          <p:cNvPr id="18" name="Shape 16"/>
+          <p:cNvSpPr/>
+          <p:nvPr/>
+        </p:nvSpPr>
+        <p:spPr>
+          <a:xfrm>
+            <a:off x="4248120" y="5020147"/>
+            <a:ext cx="3695730" cy="9510"/>
+          </a:xfrm>
+          <a:prstGeom prst="rect">
+            <a:avLst/>
+          </a:prstGeom>
+          <a:solidFill>
+            <a:srgbClr val="1E293B"/>
+          </a:solidFill>
+          <a:ln/>
+        </p:spPr>
+      </p:sp>
+      <p:sp>
+        <p:nvSpPr>
+          <p:cNvPr id="19" name="Shape 17"/>
+          <p:cNvSpPr/>
+          <p:nvPr/>
+        </p:nvSpPr>
+        <p:spPr>
+          <a:xfrm>
+            <a:off x="4248120" y="3992636"/>
+            <a:ext cx="9510" cy="1037112"/>
+          </a:xfrm>
+          <a:prstGeom prst="rect">
+            <a:avLst/>
+          </a:prstGeom>
+          <a:solidFill>
+            <a:srgbClr val="1E293B"/>
+          </a:solidFill>
+          <a:ln/>
+        </p:spPr>
+      </p:sp>
+      <p:sp>
+        <p:nvSpPr>
+          <p:cNvPr id="20" name="Text 18"/>
+          <p:cNvSpPr txBox="1"/>
+          <p:nvPr/>
+        </p:nvSpPr>
+        <p:spPr>
+          <a:xfrm>
+            <a:off x="4372021" y="4153205"/>
+            <a:ext cx="3701766" cy="164592"/>
+          </a:xfrm>
+          <a:prstGeom prst="rect">
+            <a:avLst/>
+          </a:prstGeom>
+          <a:noFill/>
+          <a:ln/>
+        </p:spPr>
+        <p:txBody>
+          <a:bodyPr wrap="none" lIns="0" tIns="0" rIns="0" bIns="0" rtlCol="0" anchor="t"/>
+          <a:lstStyle/>
+          <a:p>
+            <a:pPr algn="l" indent="0" marL="0">
+              <a:lnSpc>
+                <a:spcPts val="1296"/>
+              </a:lnSpc>
+              <a:buNone/>
+            </a:pPr>
+            <a:r>
+              <a:rPr lang="en-US" sz="864" spc="-54" kern="0" dirty="0">
+                <a:solidFill>
+                  <a:srgbClr val="FFCC00"/>
+                </a:solidFill>
+                <a:latin typeface="Consolas" pitchFamily="34" charset="0"/>
+                <a:ea typeface="Consolas" pitchFamily="34" charset="-122"/>
+                <a:cs typeface="Consolas" pitchFamily="34" charset="-120"/>
+              </a:rPr>
+              <a:t>PHASE 2: FPGA ARB CALC</a:t>
+            </a:r>
+            <a:endParaRPr lang="en-US" sz="864" dirty="0"/>
+          </a:p>
+        </p:txBody>
+      </p:sp>
+      <p:sp>
+        <p:nvSpPr>
+          <p:cNvPr id="21" name="Text 19"/>
+          <p:cNvSpPr txBox="1"/>
+          <p:nvPr/>
+        </p:nvSpPr>
+        <p:spPr>
+          <a:xfrm>
+            <a:off x="4372021" y="4354281"/>
+            <a:ext cx="3701766" cy="320040"/>
+          </a:xfrm>
+          <a:prstGeom prst="rect">
+            <a:avLst/>
+          </a:prstGeom>
+          <a:noFill/>
+          <a:ln/>
+        </p:spPr>
+        <p:txBody>
+          <a:bodyPr wrap="none" lIns="0" tIns="0" rIns="0" bIns="0" rtlCol="0" anchor="t"/>
+          <a:lstStyle/>
+          <a:p>
+            <a:pPr algn="l" indent="0" marL="0">
+              <a:lnSpc>
+                <a:spcPts val="2520"/>
+              </a:lnSpc>
+              <a:buNone/>
+            </a:pPr>
+            <a:r>
+              <a:rPr lang="en-US" sz="1680" b="1" spc="-54" kern="0" dirty="0">
+                <a:solidFill>
+                  <a:srgbClr val="FFFFFF"/>
+                </a:solidFill>
+                <a:latin typeface="Consolas" pitchFamily="34" charset="0"/>
+                <a:ea typeface="Consolas" pitchFamily="34" charset="-122"/>
+                <a:cs typeface="Consolas" pitchFamily="34" charset="-120"/>
+              </a:rPr>
+              <a:t>180 ns</a:t>
+            </a:r>
+            <a:endParaRPr lang="en-US" sz="1680" dirty="0"/>
+          </a:p>
+        </p:txBody>
+      </p:sp>
+      <p:sp>
+        <p:nvSpPr>
+          <p:cNvPr id="22" name="Text 20"/>
+          <p:cNvSpPr txBox="1"/>
+          <p:nvPr/>
+        </p:nvSpPr>
+        <p:spPr>
+          <a:xfrm>
+            <a:off x="4372021" y="4715378"/>
+            <a:ext cx="3701766" cy="171450"/>
+          </a:xfrm>
+          <a:prstGeom prst="rect">
+            <a:avLst/>
+          </a:prstGeom>
+          <a:noFill/>
+          <a:ln/>
+        </p:spPr>
+        <p:txBody>
+          <a:bodyPr wrap="none" lIns="0" tIns="0" rIns="0" bIns="0" rtlCol="0" anchor="t"/>
+          <a:lstStyle/>
+          <a:p>
+            <a:pPr algn="l" indent="0" marL="0">
+              <a:lnSpc>
+                <a:spcPts val="1350"/>
+              </a:lnSpc>
+              <a:buNone/>
+            </a:pPr>
+            <a:r>
+              <a:rPr lang="en-US" sz="900" spc="-54" kern="0" dirty="0">
+                <a:solidFill>
+                  <a:srgbClr val="94A3B8"/>
+                </a:solidFill>
+                <a:latin typeface="Consolas" pitchFamily="34" charset="0"/>
+                <a:ea typeface="Consolas" pitchFamily="34" charset="-122"/>
+                <a:cs typeface="Consolas" pitchFamily="34" charset="-120"/>
+              </a:rPr>
+              <a:t>C++23 템플릿 메타 계산</a:t>
+            </a:r>
+            <a:endParaRPr lang="en-US" sz="900" dirty="0"/>
+          </a:p>
+        </p:txBody>
+      </p:sp>
+      <p:sp>
+        <p:nvSpPr>
+          <p:cNvPr id="23" name="Shape 21"/>
+          <p:cNvSpPr/>
+          <p:nvPr/>
+        </p:nvSpPr>
+        <p:spPr>
+          <a:xfrm>
+            <a:off x="8077170" y="3992636"/>
+            <a:ext cx="3695730" cy="1037112"/>
+          </a:xfrm>
+          <a:prstGeom prst="roundRect">
+            <a:avLst>
+              <a:gd name="adj" fmla="val 5510"/>
+            </a:avLst>
+          </a:prstGeom>
+          <a:solidFill>
+            <a:srgbClr val="0B1120"/>
+          </a:solidFill>
+          <a:ln/>
+        </p:spPr>
+      </p:sp>
+      <p:sp>
+        <p:nvSpPr>
+          <p:cNvPr id="24" name="Shape 22"/>
+          <p:cNvSpPr/>
+          <p:nvPr/>
+        </p:nvSpPr>
+        <p:spPr>
+          <a:xfrm>
+            <a:off x="8077170" y="3992636"/>
+            <a:ext cx="3695730" cy="28621"/>
+          </a:xfrm>
+          <a:prstGeom prst="rect">
+            <a:avLst/>
+          </a:prstGeom>
+          <a:solidFill>
+            <a:srgbClr val="38BDF8"/>
+          </a:solidFill>
+          <a:ln/>
+        </p:spPr>
+      </p:sp>
+      <p:sp>
+        <p:nvSpPr>
+          <p:cNvPr id="25" name="Shape 23"/>
+          <p:cNvSpPr/>
+          <p:nvPr/>
+        </p:nvSpPr>
+        <p:spPr>
+          <a:xfrm>
+            <a:off x="11763390" y="3992636"/>
+            <a:ext cx="9510" cy="1037112"/>
+          </a:xfrm>
+          <a:prstGeom prst="rect">
+            <a:avLst/>
+          </a:prstGeom>
+          <a:solidFill>
+            <a:srgbClr val="1E293B"/>
+          </a:solidFill>
+          <a:ln/>
+        </p:spPr>
+      </p:sp>
+      <p:sp>
+        <p:nvSpPr>
+          <p:cNvPr id="26" name="Shape 24"/>
+          <p:cNvSpPr/>
+          <p:nvPr/>
+        </p:nvSpPr>
+        <p:spPr>
+          <a:xfrm>
+            <a:off x="8077170" y="5020147"/>
+            <a:ext cx="3695730" cy="9510"/>
+          </a:xfrm>
+          <a:prstGeom prst="rect">
+            <a:avLst/>
+          </a:prstGeom>
+          <a:solidFill>
+            <a:srgbClr val="1E293B"/>
+          </a:solidFill>
+          <a:ln/>
+        </p:spPr>
+      </p:sp>
+      <p:sp>
+        <p:nvSpPr>
+          <p:cNvPr id="27" name="Shape 25"/>
+          <p:cNvSpPr/>
+          <p:nvPr/>
+        </p:nvSpPr>
+        <p:spPr>
+          <a:xfrm>
+            <a:off x="8077170" y="3992636"/>
+            <a:ext cx="9510" cy="1037112"/>
+          </a:xfrm>
+          <a:prstGeom prst="rect">
+            <a:avLst/>
+          </a:prstGeom>
+          <a:solidFill>
+            <a:srgbClr val="1E293B"/>
+          </a:solidFill>
+          <a:ln/>
+        </p:spPr>
+      </p:sp>
+      <p:sp>
+        <p:nvSpPr>
+          <p:cNvPr id="28" name="Text 26"/>
+          <p:cNvSpPr txBox="1"/>
+          <p:nvPr/>
+        </p:nvSpPr>
+        <p:spPr>
+          <a:xfrm>
+            <a:off x="8201071" y="4153205"/>
+            <a:ext cx="3701766" cy="164592"/>
+          </a:xfrm>
+          <a:prstGeom prst="rect">
+            <a:avLst/>
+          </a:prstGeom>
+          <a:noFill/>
+          <a:ln/>
+        </p:spPr>
+        <p:txBody>
+          <a:bodyPr wrap="none" lIns="0" tIns="0" rIns="0" bIns="0" rtlCol="0" anchor="t"/>
+          <a:lstStyle/>
+          <a:p>
+            <a:pPr algn="l" indent="0" marL="0">
+              <a:lnSpc>
+                <a:spcPts val="1296"/>
+              </a:lnSpc>
+              <a:buNone/>
+            </a:pPr>
+            <a:r>
+              <a:rPr lang="en-US" sz="864" spc="-54" kern="0" dirty="0">
+                <a:solidFill>
+                  <a:srgbClr val="38BDF8"/>
+                </a:solidFill>
+                <a:latin typeface="Consolas" pitchFamily="34" charset="0"/>
+                <a:ea typeface="Consolas" pitchFamily="34" charset="-122"/>
+                <a:cs typeface="Consolas" pitchFamily="34" charset="-120"/>
+              </a:rPr>
+              <a:t>PHASE 3: DMA ORDER OUT</a:t>
+            </a:r>
+            <a:endParaRPr lang="en-US" sz="864" dirty="0"/>
+          </a:p>
+        </p:txBody>
+      </p:sp>
+      <p:sp>
+        <p:nvSpPr>
+          <p:cNvPr id="29" name="Text 27"/>
+          <p:cNvSpPr txBox="1"/>
+          <p:nvPr/>
+        </p:nvSpPr>
+        <p:spPr>
+          <a:xfrm>
+            <a:off x="8201071" y="4354281"/>
+            <a:ext cx="3701766" cy="320040"/>
+          </a:xfrm>
+          <a:prstGeom prst="rect">
+            <a:avLst/>
+          </a:prstGeom>
+          <a:noFill/>
+          <a:ln/>
+        </p:spPr>
+        <p:txBody>
+          <a:bodyPr wrap="none" lIns="0" tIns="0" rIns="0" bIns="0" rtlCol="0" anchor="t"/>
+          <a:lstStyle/>
+          <a:p>
+            <a:pPr algn="l" indent="0" marL="0">
+              <a:lnSpc>
+                <a:spcPts val="2520"/>
+              </a:lnSpc>
+              <a:buNone/>
+            </a:pPr>
+            <a:r>
+              <a:rPr lang="en-US" sz="1680" b="1" spc="-54" kern="0" dirty="0">
+                <a:solidFill>
+                  <a:srgbClr val="FFFFFF"/>
+                </a:solidFill>
+                <a:latin typeface="Consolas" pitchFamily="34" charset="0"/>
+                <a:ea typeface="Consolas" pitchFamily="34" charset="-122"/>
+                <a:cs typeface="Consolas" pitchFamily="34" charset="-120"/>
+              </a:rPr>
+              <a:t>110 ns</a:t>
+            </a:r>
+            <a:endParaRPr lang="en-US" sz="1680" dirty="0"/>
+          </a:p>
+        </p:txBody>
+      </p:sp>
+      <p:sp>
+        <p:nvSpPr>
+          <p:cNvPr id="30" name="Text 28"/>
+          <p:cNvSpPr txBox="1"/>
+          <p:nvPr/>
+        </p:nvSpPr>
+        <p:spPr>
+          <a:xfrm>
+            <a:off x="8201071" y="4715378"/>
+            <a:ext cx="3701766" cy="171450"/>
+          </a:xfrm>
+          <a:prstGeom prst="rect">
+            <a:avLst/>
+          </a:prstGeom>
+          <a:noFill/>
+          <a:ln/>
+        </p:spPr>
+        <p:txBody>
+          <a:bodyPr wrap="none" lIns="0" tIns="0" rIns="0" bIns="0" rtlCol="0" anchor="t"/>
+          <a:lstStyle/>
+          <a:p>
+            <a:pPr algn="l" indent="0" marL="0">
+              <a:lnSpc>
+                <a:spcPts val="1350"/>
+              </a:lnSpc>
+              <a:buNone/>
+            </a:pPr>
+            <a:r>
+              <a:rPr lang="en-US" sz="900" spc="-54" kern="0" dirty="0">
+                <a:solidFill>
+                  <a:srgbClr val="94A3B8"/>
+                </a:solidFill>
+                <a:latin typeface="Consolas" pitchFamily="34" charset="0"/>
+                <a:ea typeface="Consolas" pitchFamily="34" charset="-122"/>
+                <a:cs typeface="Consolas" pitchFamily="34" charset="-120"/>
+              </a:rPr>
+              <a:t>거래소 전용선 즉시 체결</a:t>
+            </a:r>
+            <a:endParaRPr lang="en-US" sz="900" dirty="0"/>
+          </a:p>
+        </p:txBody>
+      </p:sp>
+      <p:sp>
+        <p:nvSpPr>
+          <p:cNvPr id="31" name="Text 29"/>
+          <p:cNvSpPr txBox="1"/>
+          <p:nvPr/>
+        </p:nvSpPr>
+        <p:spPr>
+          <a:xfrm>
+            <a:off x="400050" y="6349228"/>
+            <a:ext cx="12281124" cy="164592"/>
+          </a:xfrm>
+          <a:prstGeom prst="rect">
+            <a:avLst/>
+          </a:prstGeom>
+          <a:noFill/>
+          <a:ln/>
+        </p:spPr>
+        <p:txBody>
+          <a:bodyPr wrap="none" lIns="0" tIns="0" rIns="0" bIns="0" rtlCol="0" anchor="t"/>
+          <a:lstStyle/>
+          <a:p>
+            <a:pPr algn="l" indent="0" marL="0">
+              <a:lnSpc>
+                <a:spcPts val="1296"/>
+              </a:lnSpc>
+              <a:buNone/>
+            </a:pPr>
+            <a:r>
+              <a:rPr lang="en-US" sz="864" spc="-54" kern="0" dirty="0">
+                <a:solidFill>
+                  <a:srgbClr val="64748B"/>
+                </a:solidFill>
+                <a:latin typeface="Consolas" pitchFamily="34" charset="0"/>
+                <a:ea typeface="Consolas" pitchFamily="34" charset="-122"/>
+                <a:cs typeface="Consolas" pitchFamily="34" charset="-120"/>
+              </a:rPr>
+              <a:t>* Total Round-Trip: 380 ns (World Record Benchmark, 2026.08)</a:t>
+            </a:r>
+            <a:endParaRPr lang="en-US" sz="864" dirty="0"/>
+          </a:p>
+        </p:txBody>
+      </p:sp>
     </p:spTree>
   </p:cSld>
   <p:clrMapOvr>
